--- a/dist/초5/영어/상호작용과문화/초5_영어_상호작용과문화_01_길묻고안내하기.pptx
+++ b/dist/초5/영어/상호작용과문화/초5_영어_상호작용과문화_01_길묻고안내하기.pptx
@@ -120,20 +120,20 @@
   <p:extLst>
     <p:ext uri="{521415D9-36F7-43E2-AB2F-B90AF26B5E84}">
       <p14:sectionLst xmlns:p14="http://schemas.microsoft.com/office/powerpoint/2010/main">
-        <p14:section name="도입" id="{86430766-2bcf-52ce-e6c4-a50adc9d7eca}">
+        <p14:section name="도입" id="{3a29a813-a83c-8cd9-a4e9-d2fca712608b}">
           <p14:sldIdLst>
             <p14:sldId id="256"/>
             <p14:sldId id="257"/>
           </p14:sldIdLst>
         </p14:section>
-        <p14:section name="개념" id="{5164821c-e285-37b5-7c87-ef77cce7f41c}">
+        <p14:section name="개념" id="{5d848b51-238e-4ac3-b9ec-76472b5295c3}">
           <p14:sldIdLst>
             <p14:sldId id="258"/>
             <p14:sldId id="259"/>
             <p14:sldId id="260"/>
           </p14:sldIdLst>
         </p14:section>
-        <p14:section name="연습" id="{6b662c80-3eca-9bb0-bf61-e1972f7a0f77}">
+        <p14:section name="연습" id="{9a5490d8-a9ac-f9ce-5fe2-c19a70602584}">
           <p14:sldIdLst>
             <p14:sldId id="261"/>
             <p14:sldId id="262"/>
@@ -141,19 +141,19 @@
             <p14:sldId id="264"/>
           </p14:sldIdLst>
         </p14:section>
-        <p14:section name="확인" id="{27b48a89-c3e5-48c2-a454-36dc8846046d}">
+        <p14:section name="확인" id="{7ef486d2-76e6-790a-e2df-07bc09d72e18}">
           <p14:sldIdLst>
             <p14:sldId id="265"/>
             <p14:sldId id="266"/>
             <p14:sldId id="267"/>
           </p14:sldIdLst>
         </p14:section>
-        <p14:section name="정리" id="{2cc06a95-a35e-b560-d2fa-280c94dec12f}">
+        <p14:section name="정리" id="{49eb2acf-a83a-6cf2-9931-71cfa381b5d0}">
           <p14:sldIdLst>
             <p14:sldId id="268"/>
           </p14:sldIdLst>
         </p14:section>
-        <p14:section name="보충" id="{f02fab55-42a2-d9a6-5613-d3f3ba383a96}">
+        <p14:section name="보충" id="{81e9c427-d2b1-ee65-06bc-20b481bfe34d}">
           <p14:sldIdLst>
             <p14:sldId id="269"/>
           </p14:sldIdLst>
